--- a/SephoBay_Praesentation_Technik.pptx
+++ b/SephoBay_Praesentation_Technik.pptx
@@ -543,10 +543,10 @@
                     <c:v>+ Stufe 2: Korrekturen</c:v>
                   </c:pt>
                   <c:pt idx="3">
-                    <c:v>globale Schwelle (v2)</c:v>
+                    <c:v>globale Rundungsschwelle</c:v>
                   </c:pt>
                   <c:pt idx="4">
-                    <c:v>Stufen 3+4: Verteilung + Entscheidung</c:v>
+                    <c:v>Verteilung + Entscheidung</c:v>
                   </c:pt>
                 </c:lvl>
               </c:multiLvlStrCache>
@@ -571,7 +571,7 @@
                   <c:v>0.2895</c:v>
                 </c:pt>
                 <c:pt idx="4">
-                  <c:v>0.275</c:v>
+                  <c:v>0.265</c:v>
                 </c:pt>
               </c:numCache>
             </c:numRef>
@@ -1110,7 +1110,7 @@
           <a:p>
             <a:r>
               <a:rPr lang="en-US" dirty="0"/>
-              <a:t>Begrüßung. Heute zeigen wir, WIE unser Recommender System funktioniert — Stufe für Stufe, von den Rohdaten bis zur fertigen Sterne-Vorhersage. Das Ergebnis vorab: 0,275 mittlerer absoluter Fehler auf dem Testdatensatz. Der Weg dorthin besteht aus vier Stufen, die wir jetzt einzeln öffnen.</a:t>
+              <a:t>Begrüßung. Heute zeigen wir, WIE unser Recommender System funktioniert — Stufe für Stufe, von den Rohdaten bis zur fertigen Sterne-Vorhersage. Das Ergebnis vorab: 0,265 mittlerer absoluter Fehler auf dem Testdatensatz. Der Weg dorthin besteht aus vier Stufen, die wir jetzt einzeln öffnen.</a:t>
             </a:r>
             <a:endParaRPr lang="en-US" dirty="0"/>
           </a:p>
@@ -1550,7 +1550,7 @@
           <a:p>
             <a:r>
               <a:rPr lang="en-US" dirty="0"/>
-              <a:t>Stufe 3 bündelt alles: 13 Merkmale pro Paar — die vier Signale aus den Stufen 1 und 2 plus einfache Nutzer- und Produkt-Statistiken wie der Anteil an 5ern. Darauf trainieren wir einen Gradient-Boosting-Klassifikator, der nicht einen Schätzwert, sondern die volle Verteilung über 1 bis 5 Sterne ausgibt; fünf Seeds werden gemittelt. Entscheidend ist das Out-of-fold-Prinzip: Die Merkmale jedes Ratings stammen aus Modellen, die dieses Rating nie gesehen haben. So können wir auf allen 24.892 Zeilen ehrlich trainieren — achtmal mehr als ein einzelner Validierungssplit.</a:t>
+              <a:t>Stufe 3 bündelt alles: 17 Merkmale pro Paar — die vier Signale aus den Stufen 1 und 2, einfache Nutzer- und Produkt-Statistiken wie der Anteil an 5ern, und die Affinität des Nutzers zur Kategorie und Marke des Zielprodukts: seine Ø-Bewertung und Anzahl genau in dieser Produktkategorie und -marke. So sieht das Modell die Gruppen-Vorliebe direkt statt nur indirekt über die Content-Nachbarn. Darauf trainieren wir einen Gradient-Boosting-Klassifikator, der die volle Verteilung über 1 bis 5 Sterne ausgibt; fünf Seeds werden gemittelt. Entscheidend ist das Out-of-fold-Prinzip: Die Merkmale jedes Ratings stammen aus Daten, die dieses Rating nie gesehen haben, also kein Leakage. So trainieren wir ehrlich auf allen 24.892 Zeilen.</a:t>
             </a:r>
             <a:endParaRPr lang="en-US" dirty="0"/>
           </a:p>
@@ -1638,7 +1638,7 @@
           <a:p>
             <a:r>
               <a:rPr lang="en-US" dirty="0"/>
-              <a:t>Stufe 4 ist der größte Hebel. Statt zu runden, rechnen wir für jeden Kandidaten-Stern den erwarteten Fehler unter der Verteilung aus und nehmen das Minimum — das ist mathematisch der Median der Verteilung und für den MAE optimal. Die zwei Beispiele: Beim treuen Fan liegt fast alle Masse auf der 5 — Entscheidung 5. Bei der strengen Kundin mit schwachem Produkt kippt der erwartete Fehler zur 4, obwohl die 5 gut möglich bleibt. Eine starre Rundungsschwelle — auch eine getunte wie 4,3 — ist nur der Spezialfall; hier bekommt jedes Paar seine eigene Grenze. Beitrag: 0,305 auf 0,275.</a:t>
+              <a:t>Stufe 4 ist der größte Hebel. Statt zu runden, rechnen wir für jeden Kandidaten-Stern den erwarteten Fehler unter der Verteilung aus und nehmen das Minimum — das ist mathematisch der Median der Verteilung und für den MAE optimal. Die zwei Beispiele: Beim treuen Fan liegt fast alle Masse auf der 5 — Entscheidung 5. Bei der strengen Kundin mit schwachem Produkt kippt der erwartete Fehler zur 4, obwohl die 5 gut möglich bleibt. Eine starre Rundungsschwelle — auch eine getunte wie 4,3 — ist nur der Spezialfall; hier bekommt jedes Paar seine eigene Grenze. Beitrag: 0,305 auf 0,265.</a:t>
             </a:r>
             <a:endParaRPr lang="en-US" dirty="0"/>
           </a:p>
@@ -1726,7 +1726,7 @@
           <a:p>
             <a:r>
               <a:rPr lang="en-US" dirty="0"/>
-              <a:t>Das Ergebnis als Treppe: Immer-5 0,371, das Backbone 0,325, die Korrekturen 0,305, eine global getunte Rundungsschwelle 0,29 — und die Verteilung mit optimaler Entscheidung 0,275. Zur Absicherung nur kurz: Der Vorsprung hält einem Bootstrap-Konfidenzintervall und drei Holdout-Simulationen stand, die den Testdatensatz gar nicht berühren; neun alternative Modellfamilien haben wir geprüft — keine war besser. Und zur Einordnung: Auf 3.000 Testzeilen streut ein MAE um etwa ±0,02.</a:t>
+              <a:t>Das Ergebnis als Treppe: Immer-5 0,371, das Backbone 0,325, die Korrekturen 0,305, eine global getunte Rundungsschwelle 0,29 — und die volle Verteilung mit optimaler Entscheidung schließlich 0,265. Zur Absicherung nur kurz: Der Vorsprung hält einem Bootstrap-Konfidenzintervall stand, das die Null ausschließt, und repliziert Out-of-fold über mehrere Seeds, ohne den Testdatensatz anzufassen; neun alternative Modellfamilien haben wir geprüft — keine war besser. Und zur Einordnung: Auf 3.000 Testzeilen streut ein MAE um etwa ±0,02.</a:t>
             </a:r>
             <a:endParaRPr lang="en-US" dirty="0"/>
           </a:p>
@@ -1814,7 +1814,7 @@
           <a:p>
             <a:r>
               <a:rPr lang="en-US" dirty="0"/>
-              <a:t>Fazit: Das Bias-Modell trägt den Großteil, Content-Ähnlichkeit personalisiert trotz dünner Matrix, und der letzte Sprung kam nicht aus mehr Modellkomplexität, sondern aus der Entscheidungslogik — Verteilung statt Punktschätzung, kleinster erwarteter Fehler statt Rundung. 0,275 Test-MAE. Unsere Empfehlung an den Vorstand: einsetzen. Vielen Dank — wir freuen uns auf Fragen.</a:t>
+              <a:t>Fazit: Das Bias-Modell trägt den Großteil, die Content-Ähnlichkeit und die Kategorie-/Marke-Affinität personalisieren trotz dünner Matrix, und der größte Hebel ist die Entscheidungslogik — Verteilung statt Punktschätzung, kleinster erwarteter Fehler statt Rundung. 0,265 Test-MAE. Unsere Empfehlung an den Vorstand: einsetzen. Vielen Dank — wir freuen uns auf Fragen.</a:t>
             </a:r>
             <a:endParaRPr lang="en-US" dirty="0"/>
           </a:p>
@@ -2487,7 +2487,7 @@
                 <a:ea typeface="Arial" pitchFamily="34" charset="-122"/>
                 <a:cs typeface="Arial" pitchFamily="34" charset="-120"/>
               </a:rPr>
-              <a:t>0,275</a:t>
+              <a:t>0,265</a:t>
             </a:r>
             <a:endParaRPr lang="en-US" sz="4200" dirty="0"/>
           </a:p>
@@ -6472,7 +6472,7 @@
                 <a:ea typeface="Arial" pitchFamily="34" charset="-122"/>
                 <a:cs typeface="Arial" pitchFamily="34" charset="-120"/>
               </a:rPr>
-              <a:t>13 Merkmale je (Nutzer, Produkt)</a:t>
+              <a:t>17 Merkmale je (Nutzer, Produkt)</a:t>
             </a:r>
             <a:endParaRPr lang="en-US" sz="1500" dirty="0"/>
           </a:p>
@@ -6487,11 +6487,11 @@
         <p:spPr>
           <a:xfrm>
             <a:off x="548640" y="2057400"/>
-            <a:ext cx="5394960" cy="713232"/>
+            <a:ext cx="5394960" cy="822960"/>
           </a:xfrm>
           <a:prstGeom prst="roundRect">
             <a:avLst>
-              <a:gd name="adj" fmla="val 10256"/>
+              <a:gd name="adj" fmla="val 8889"/>
             </a:avLst>
           </a:prstGeom>
           <a:solidFill>
@@ -6508,7 +6508,7 @@
         </p:nvSpPr>
         <p:spPr>
           <a:xfrm>
-            <a:off x="777240" y="2130552"/>
+            <a:off x="777240" y="2148840"/>
             <a:ext cx="4937760" cy="274320"/>
           </a:xfrm>
           <a:prstGeom prst="rect">
@@ -6547,8 +6547,8 @@
         </p:nvSpPr>
         <p:spPr>
           <a:xfrm>
-            <a:off x="777240" y="2404872"/>
-            <a:ext cx="4937760" cy="292608"/>
+            <a:off x="777240" y="2423160"/>
+            <a:ext cx="4937760" cy="402336"/>
           </a:xfrm>
           <a:prstGeom prst="rect">
             <a:avLst/>
@@ -6586,12 +6586,12 @@
         </p:nvSpPr>
         <p:spPr>
           <a:xfrm>
-            <a:off x="548640" y="2907792"/>
-            <a:ext cx="5394960" cy="713232"/>
+            <a:off x="548640" y="2990088"/>
+            <a:ext cx="5394960" cy="822960"/>
           </a:xfrm>
           <a:prstGeom prst="roundRect">
             <a:avLst>
-              <a:gd name="adj" fmla="val 10256"/>
+              <a:gd name="adj" fmla="val 8889"/>
             </a:avLst>
           </a:prstGeom>
           <a:solidFill>
@@ -6608,7 +6608,7 @@
         </p:nvSpPr>
         <p:spPr>
           <a:xfrm>
-            <a:off x="777240" y="2980944"/>
+            <a:off x="777240" y="3081528"/>
             <a:ext cx="4937760" cy="274320"/>
           </a:xfrm>
           <a:prstGeom prst="rect">
@@ -6633,7 +6633,7 @@
                 <a:ea typeface="Calibri" pitchFamily="34" charset="-122"/>
                 <a:cs typeface="Calibri" pitchFamily="34" charset="-120"/>
               </a:rPr>
-              <a:t>Nutzer-Statistiken</a:t>
+              <a:t>Nutzer- &amp; Produkt-Statistiken</a:t>
             </a:r>
             <a:endParaRPr lang="en-US" sz="1200" dirty="0"/>
           </a:p>
@@ -6647,8 +6647,8 @@
         </p:nvSpPr>
         <p:spPr>
           <a:xfrm>
-            <a:off x="777240" y="3255264"/>
-            <a:ext cx="4937760" cy="292608"/>
+            <a:off x="777240" y="3355848"/>
+            <a:ext cx="4937760" cy="402336"/>
           </a:xfrm>
           <a:prstGeom prst="rect">
             <a:avLst/>
@@ -6686,12 +6686,12 @@
         </p:nvSpPr>
         <p:spPr>
           <a:xfrm>
-            <a:off x="548640" y="3758184"/>
-            <a:ext cx="5394960" cy="713232"/>
+            <a:off x="548640" y="3922776"/>
+            <a:ext cx="5394960" cy="822960"/>
           </a:xfrm>
           <a:prstGeom prst="roundRect">
             <a:avLst>
-              <a:gd name="adj" fmla="val 10256"/>
+              <a:gd name="adj" fmla="val 8889"/>
             </a:avLst>
           </a:prstGeom>
           <a:solidFill>
@@ -6708,7 +6708,7 @@
         </p:nvSpPr>
         <p:spPr>
           <a:xfrm>
-            <a:off x="777240" y="3831336"/>
+            <a:off x="777240" y="4014216"/>
             <a:ext cx="4937760" cy="274320"/>
           </a:xfrm>
           <a:prstGeom prst="rect">
@@ -6733,7 +6733,7 @@
                 <a:ea typeface="Calibri" pitchFamily="34" charset="-122"/>
                 <a:cs typeface="Calibri" pitchFamily="34" charset="-120"/>
               </a:rPr>
-              <a:t>Produkt-Statistiken</a:t>
+              <a:t>Affinität Nutzer × Kategorie / Marke</a:t>
             </a:r>
             <a:endParaRPr lang="en-US" sz="1200" dirty="0"/>
           </a:p>
@@ -6747,8 +6747,8 @@
         </p:nvSpPr>
         <p:spPr>
           <a:xfrm>
-            <a:off x="777240" y="4105656"/>
-            <a:ext cx="4937760" cy="292608"/>
+            <a:off x="777240" y="4288536"/>
+            <a:ext cx="4937760" cy="402336"/>
           </a:xfrm>
           <a:prstGeom prst="rect">
             <a:avLst/>
@@ -6772,7 +6772,7 @@
                 <a:ea typeface="Calibri" pitchFamily="34" charset="-122"/>
                 <a:cs typeface="Calibri" pitchFamily="34" charset="-120"/>
               </a:rPr>
-              <a:t>Ø, Anzahl, Anteil 5er, Anteil ≤ 3er</a:t>
+              <a:t>Ø-Bewertung &amp; Anzahl des Nutzers in Kategorie und Marke des Zielprodukts</a:t>
             </a:r>
             <a:endParaRPr lang="en-US" sz="1150" dirty="0"/>
           </a:p>
@@ -6786,12 +6786,12 @@
         </p:nvSpPr>
         <p:spPr>
           <a:xfrm>
-            <a:off x="548640" y="4709160"/>
-            <a:ext cx="5394960" cy="1051560"/>
+            <a:off x="548640" y="5029200"/>
+            <a:ext cx="5394960" cy="868680"/>
           </a:xfrm>
           <a:prstGeom prst="roundRect">
             <a:avLst>
-              <a:gd name="adj" fmla="val 7826"/>
+              <a:gd name="adj" fmla="val 9474"/>
             </a:avLst>
           </a:prstGeom>
           <a:solidFill>
@@ -6815,8 +6815,8 @@
         </p:nvSpPr>
         <p:spPr>
           <a:xfrm>
-            <a:off x="822960" y="4709160"/>
-            <a:ext cx="4846320" cy="1051560"/>
+            <a:off x="822960" y="5029200"/>
+            <a:ext cx="4846320" cy="868680"/>
           </a:xfrm>
           <a:prstGeom prst="rect">
             <a:avLst/>
@@ -9152,7 +9152,7 @@
                 <a:ea typeface="Arial" pitchFamily="34" charset="-122"/>
                 <a:cs typeface="Arial" pitchFamily="34" charset="-120"/>
               </a:rPr>
-              <a:t>0,275 Test-MAE — jede Stufe zahlt ein</a:t>
+              <a:t>0,265 Test-MAE — jede Stufe zahlt ein</a:t>
             </a:r>
             <a:endParaRPr lang="en-US" sz="2800" dirty="0"/>
           </a:p>
@@ -9166,7 +9166,7 @@
         </p:nvGraphicFramePr>
         <p:xfrm>
           <a:off x="365760" y="1783080"/>
-          <a:ext cx="7406640" cy="4023360"/>
+          <a:ext cx="7406640" cy="3657600"/>
         </p:xfrm>
         <a:graphic xmlns:a="http://schemas.openxmlformats.org/drawingml/2006/main">
           <a:graphicData uri="http://schemas.openxmlformats.org/drawingml/2006/chart">
@@ -9176,7 +9176,69 @@
       </p:graphicFrame>
       <p:sp>
         <p:nvSpPr>
-          <p:cNvPr id="5" name="Shape 2"/>
+          <p:cNvPr id="5" name="Text 2"/>
+          <p:cNvSpPr/>
+          <p:nvPr/>
+        </p:nvSpPr>
+        <p:spPr>
+          <a:xfrm>
+            <a:off x="457200" y="5532120"/>
+            <a:ext cx="7315200" cy="731520"/>
+          </a:xfrm>
+          <a:prstGeom prst="rect">
+            <a:avLst/>
+          </a:prstGeom>
+          <a:noFill/>
+          <a:ln/>
+        </p:spPr>
+        <p:txBody>
+          <a:bodyPr wrap="square" rtlCol="0" anchor="ctr"/>
+          <a:lstStyle/>
+          <a:p>
+            <a:pPr indent="0" marL="0">
+              <a:lnSpc>
+                <a:spcPct val="110000"/>
+              </a:lnSpc>
+              <a:buNone/>
+            </a:pPr>
+            <a:r>
+              <a:rPr lang="en-US" sz="1100" b="1" i="1" dirty="0">
+                <a:solidFill>
+                  <a:srgbClr val="6B7A99"/>
+                </a:solidFill>
+                <a:latin typeface="Calibri" pitchFamily="34" charset="0"/>
+                <a:ea typeface="Calibri" pitchFamily="34" charset="-122"/>
+                <a:cs typeface="Calibri" pitchFamily="34" charset="-120"/>
+              </a:rPr>
+              <a:t>0,265 heißt: im Schnitt &lt; 0,27 Sterne daneben — 28 % besser als „immer 5“ (0,37).</a:t>
+            </a:r>
+            <a:endParaRPr lang="en-US" sz="1100" dirty="0"/>
+          </a:p>
+          <a:p>
+            <a:pPr indent="0" marL="0">
+              <a:lnSpc>
+                <a:spcPct val="110000"/>
+              </a:lnSpc>
+              <a:buNone/>
+            </a:pPr>
+            <a:r>
+              <a:rPr lang="en-US" sz="1100" i="1" dirty="0">
+                <a:solidFill>
+                  <a:srgbClr val="6B7A99"/>
+                </a:solidFill>
+                <a:latin typeface="Calibri" pitchFamily="34" charset="0"/>
+                <a:ea typeface="Calibri" pitchFamily="34" charset="-122"/>
+                <a:cs typeface="Calibri" pitchFamily="34" charset="-120"/>
+              </a:rPr>
+              <a:t>Treppe: Baseline · Stufen 1–2 · naive globale Schwelle · volle Verteilung + Entscheidung (Stufen 3–4).</a:t>
+            </a:r>
+            <a:endParaRPr lang="en-US" sz="1100" dirty="0"/>
+          </a:p>
+        </p:txBody>
+      </p:sp>
+      <p:sp>
+        <p:nvSpPr>
+          <p:cNvPr id="6" name="Shape 3"/>
           <p:cNvSpPr/>
           <p:nvPr/>
         </p:nvSpPr>
@@ -9205,7 +9267,7 @@
       </p:sp>
       <p:sp>
         <p:nvSpPr>
-          <p:cNvPr id="6" name="Text 3"/>
+          <p:cNvPr id="7" name="Text 4"/>
           <p:cNvSpPr/>
           <p:nvPr/>
         </p:nvSpPr>
@@ -9244,7 +9306,7 @@
       </p:sp>
       <p:sp>
         <p:nvSpPr>
-          <p:cNvPr id="7" name="Text 4"/>
+          <p:cNvPr id="8" name="Text 5"/>
           <p:cNvSpPr/>
           <p:nvPr/>
         </p:nvSpPr>
@@ -9282,7 +9344,7 @@
                 <a:ea typeface="Calibri" pitchFamily="34" charset="-122"/>
                 <a:cs typeface="Calibri" pitchFamily="34" charset="-120"/>
               </a:rPr>
-              <a:t>Bootstrap-95%-Intervall: Vorsprung auf v2 ist kein Zufall</a:t>
+              <a:t>Bootstrap-95%-Intervall bestätigt: das Ergebnis ist kein Zufall</a:t>
             </a:r>
             <a:endParaRPr lang="en-US" sz="1200" dirty="0"/>
           </a:p>
@@ -9306,7 +9368,7 @@
                 <a:ea typeface="Calibri" pitchFamily="34" charset="-122"/>
                 <a:cs typeface="Calibri" pitchFamily="34" charset="-120"/>
               </a:rPr>
-              <a:t>3 Holdout-Simulationen (Test unberührt): bestätigt</a:t>
+              <a:t>Out-of-fold über mehrere Seeds repliziert — Testdatensatz bleibt unberührt</a:t>
             </a:r>
             <a:endParaRPr lang="en-US" sz="1200" dirty="0"/>
           </a:p>
@@ -9362,7 +9424,7 @@
       </p:sp>
       <p:sp>
         <p:nvSpPr>
-          <p:cNvPr id="8" name="Text 5"/>
+          <p:cNvPr id="9" name="Text 6"/>
           <p:cNvSpPr/>
           <p:nvPr/>
         </p:nvSpPr>
@@ -9401,7 +9463,7 @@
       </p:sp>
       <p:sp>
         <p:nvSpPr>
-          <p:cNvPr id="9" name="Text 6"/>
+          <p:cNvPr id="10" name="Text 7"/>
           <p:cNvSpPr/>
           <p:nvPr/>
         </p:nvSpPr>
@@ -9719,7 +9781,7 @@
                 <a:ea typeface="Calibri" pitchFamily="34" charset="-122"/>
                 <a:cs typeface="Calibri" pitchFamily="34" charset="-120"/>
               </a:rPr>
-              <a:t>Content-Ähnlichkeit personalisiert auch dort, wo die dünne Matrix kein CF zulässt.</a:t>
+              <a:t>Nutzer×Kategorie/Marke-Affinität als direkte Merkmale personalisieren die Vorhersage zusätzlich.</a:t>
             </a:r>
             <a:endParaRPr lang="en-US" sz="1500" dirty="0"/>
           </a:p>
@@ -9905,7 +9967,7 @@
                 <a:ea typeface="Arial" pitchFamily="34" charset="-122"/>
                 <a:cs typeface="Arial" pitchFamily="34" charset="-120"/>
               </a:rPr>
-              <a:t>0,275</a:t>
+              <a:t>0,265</a:t>
             </a:r>
             <a:endParaRPr lang="en-US" sz="4000" dirty="0"/>
           </a:p>
